--- a/Fitness_Challenge_Presentation.pptx
+++ b/Fitness_Challenge_Presentation.pptx
@@ -12131,7 +12131,7 @@
         <p:spPr>
           <a:xfrm>
             <a:off x="8339326" y="1865376"/>
-            <a:ext cx="3246120" cy="2121408"/>
+            <a:ext cx="3246120" cy="1260538"/>
           </a:xfrm>
           <a:prstGeom prst="rect">
             <a:avLst/>
@@ -12169,13 +12169,31 @@
               </a:spcAft>
             </a:pPr>
             <a:r>
+              <a:rPr lang="en-IN" sz="1250">
+                <a:solidFill>
+                  <a:srgbClr val="475569"/>
+                </a:solidFill>
+                <a:latin typeface="Segoe UI"/>
+              </a:rPr>
+              <a:t>Check</a:t>
+            </a:r>
+            <a:r>
+              <a:rPr sz="1250">
+                <a:solidFill>
+                  <a:srgbClr val="475569"/>
+                </a:solidFill>
+                <a:latin typeface="Segoe UI"/>
+              </a:rPr>
+              <a:t> </a:t>
+            </a:r>
+            <a:r>
               <a:rPr sz="1250" dirty="0">
                 <a:solidFill>
                   <a:srgbClr val="475569"/>
                 </a:solidFill>
                 <a:latin typeface="Segoe UI"/>
               </a:rPr>
-              <a:t>Cached response on duplicate key</a:t>
+              <a:t>response on duplicate key</a:t>
             </a:r>
           </a:p>
           <a:p>

--- a/Fitness_Challenge_Presentation.pptx
+++ b/Fitness_Challenge_Presentation.pptx
@@ -313,8 +313,10 @@
           <a:lstStyle/>
           <a:p>
             <a:r>
-              <a:t>Open on the RUNNING app in a browser, not this slide. One line: 'I built a full-stack fitness challenge that normalises six different sports into one fair points system.' Keep it to 20 seconds, then move to the agenda. Replace [Your Name] and links before presenting.</a:t>
-            </a:r>
+              <a:rPr lang="en-IN" dirty="0"/>
+              <a:t> </a:t>
+            </a:r>
+            <a:endParaRPr dirty="0"/>
           </a:p>
         </p:txBody>
       </p:sp>
@@ -382,9 +384,7 @@
           <a:bodyPr/>
           <a:lstStyle/>
           <a:p>
-            <a:r>
-              <a:t>This is the slide the panel cares most about — it's the core algorithm. Walk the three examples out loud. The BigDecimal point is your 'attention to detail' moment: floating-point errors would corrupt scores. Stress that points are computed once and stored, so historical scores never change if rates are later adjusted.</a:t>
-            </a:r>
+            <a:endParaRPr dirty="0"/>
           </a:p>
         </p:txBody>
       </p:sp>
@@ -453,8 +453,10 @@
           <a:lstStyle/>
           <a:p>
             <a:r>
-              <a:t>The spec explicitly asks for 400 on mismatched sport/metric. Show you solved it cleanly with a custom class-level validator rather than imperative checks in the controller. The two-stage split (field then cross-field) is the reusable, testable design.</a:t>
-            </a:r>
+              <a:rPr lang="en-IN" dirty="0"/>
+              <a:t> </a:t>
+            </a:r>
+            <a:endParaRPr dirty="0"/>
           </a:p>
         </p:txBody>
       </p:sp>
@@ -523,8 +525,10 @@
           <a:lstStyle/>
           <a:p>
             <a:r>
-              <a:t>Key architectural decision: charts are dumb — pages fetch and pre-process, charts just render. This keeps data logic testable and out of the view. The 'fill missing weeks with zero' detail shows you thought about UX: a gap-free trend line. Mention TanStack Query's cache invalidation: after a mutation the UI updates without a full reload.</a:t>
-            </a:r>
+              <a:rPr lang="en-IN" dirty="0"/>
+              <a:t> </a:t>
+            </a:r>
+            <a:endParaRPr dirty="0"/>
           </a:p>
         </p:txBody>
       </p:sp>
@@ -593,8 +597,10 @@
           <a:lstStyle/>
           <a:p>
             <a:r>
-              <a:t>Anticipate the 'won't that query get slow?' question — you already have the answer on the slide. The 'rank first then paginate' point is subtle and impressive: naive implementations restart ranking per page. Emphasise you chose correctness now with a clear scaling path documented.</a:t>
-            </a:r>
+              <a:rPr lang="en-IN" dirty="0"/>
+              <a:t> </a:t>
+            </a:r>
+            <a:endParaRPr dirty="0"/>
           </a:p>
         </p:txBody>
       </p:sp>
@@ -662,9 +668,7 @@
           <a:bodyPr/>
           <a:lstStyle/>
           <a:p>
-            <a:r>
-              <a:t>This is your standout slide — it shows product thinking beyond the spec. It's the industry-standard 'Stripe pattern'. The clever DB detail: a nullable UNIQUE column allows unlimited NULLs (requests without a key) while still enforcing uniqueness on real keys. Mention it's fully unit-tested.</a:t>
-            </a:r>
+            <a:endParaRPr dirty="0"/>
           </a:p>
         </p:txBody>
       </p:sp>
@@ -732,9 +736,7 @@
           <a:bodyPr/>
           <a:lstStyle/>
           <a:p>
-            <a:r>
-              <a:t>This slide directly answers spec section (f): trade-offs and edge cases. Don't read every row — pick 3 and narrate: concurrency, the flooring-to-zero cases, and BigDecimal. Then say 'the full list is in DESIGN.md.' It signals rigour and that you tested boundaries, not just the happy path.</a:t>
-            </a:r>
+            <a:endParaRPr dirty="0"/>
           </a:p>
         </p:txBody>
       </p:sp>
@@ -802,9 +804,7 @@
           <a:bodyPr/>
           <a:lstStyle/>
           <a:p>
-            <a:r>
-              <a:t>Have the numbers ready — '164 backend, 123 frontend'. Offer to run 'mvn test' or 'npm test' live if they want proof. Highlight the idempotency tests specifically: asserting the scoring engine is NOT called on a duplicate is the kind of test that proves you understood the requirement.</a:t>
-            </a:r>
+            <a:endParaRPr dirty="0"/>
           </a:p>
         </p:txBody>
       </p:sp>
@@ -872,9 +872,7 @@
           <a:bodyPr/>
           <a:lstStyle/>
           <a:p>
-            <a:r>
-              <a:t>This is the slide that separates mid from senior. Lead with Flyway — 'ddl-auto:update is dev-only and can silently corrupt a shared schema.' Then auth. Frame it as: 'I scoped these out deliberately for the assignment; here's exactly what I'd add and why.' Never apologise for what's missing — own the scope.</a:t>
-            </a:r>
+            <a:endParaRPr lang="en-US" dirty="0"/>
           </a:p>
         </p:txBody>
       </p:sp>
@@ -942,9 +940,7 @@
           <a:bodyPr/>
           <a:lstStyle/>
           <a:p>
-            <a:r>
-              <a:t>Ideally you demo LIVE at the start; this slide is a fallback/closer if you saved it for the end. Seed the DB beforehand so the leaderboard looks populated. The idempotency demo (step 4) is your mic-drop. End by inviting questions on your strongest topics so you steer the Q&amp;A.</a:t>
-            </a:r>
+            <a:endParaRPr dirty="0"/>
           </a:p>
         </p:txBody>
       </p:sp>
@@ -1013,8 +1009,10 @@
           <a:lstStyle/>
           <a:p>
             <a:r>
-              <a:t>15 seconds. Signal structure so the panel knows the shape of the talk. Say: 'I'll demo first, then walk the architecture and the engineering decisions behind it, and close with what I'd do to make it production-ready.'</a:t>
-            </a:r>
+              <a:rPr lang="en-IN" dirty="0"/>
+              <a:t> </a:t>
+            </a:r>
+            <a:endParaRPr dirty="0"/>
           </a:p>
         </p:txBody>
       </p:sp>
@@ -1083,8 +1081,10 @@
           <a:lstStyle/>
           <a:p>
             <a:r>
-              <a:t>Frame the core intellectual problem: fair comparison across incompatible metrics. This is what the whole assignment hinges on. Don't rush — the panel wants to know you understood the 'why', not just the 'what'.</a:t>
-            </a:r>
+              <a:rPr lang="en-IN" dirty="0"/>
+              <a:t> </a:t>
+            </a:r>
+            <a:endParaRPr dirty="0"/>
           </a:p>
         </p:txBody>
       </p:sp>
@@ -1153,9 +1153,10 @@
           <a:lstStyle/>
           <a:p>
             <a:r>
-              <a:rPr dirty="0"/>
-              <a:t>This is your 'I read the spec carefully' slide. Walk down the Status column — everything is Done. Land the last row: 'I also went beyond the spec with idempotency, which I'll explain later.' Shows initiative without over-claiming.</a:t>
-            </a:r>
+              <a:rPr lang="en-IN" dirty="0"/>
+              <a:t> </a:t>
+            </a:r>
+            <a:endParaRPr dirty="0"/>
           </a:p>
         </p:txBody>
       </p:sp>
@@ -1224,9 +1225,10 @@
           <a:lstStyle/>
           <a:p>
             <a:r>
-              <a:rPr dirty="0"/>
-              <a:t>Don't just list tech — justify each. The spec allowed any stack, so your reasoning matters more than the choice. Key line: 'PostgreSQL JSONB let me support arbitrary metadata without schema migrations.' Be ready for 'why not Node?' — answer: type safety and built-in validation for a domain with strict rules.</a:t>
-            </a:r>
+              <a:rPr lang="en-IN" dirty="0"/>
+              <a:t> </a:t>
+            </a:r>
+            <a:endParaRPr dirty="0"/>
           </a:p>
         </p:txBody>
       </p:sp>
@@ -1295,8 +1297,10 @@
           <a:lstStyle/>
           <a:p>
             <a:r>
-              <a:t>Show ONE diagram, not the whole DESIGN.md. Emphasise the assumptions box at the bottom: you sized the architecture to the problem. Senior engineers respect 'I chose simple on purpose' far more than accidental complexity. Note the leaderboard is derived, not stored.</a:t>
-            </a:r>
+              <a:rPr lang="en-IN" dirty="0"/>
+              <a:t> </a:t>
+            </a:r>
+            <a:endParaRPr dirty="0"/>
           </a:p>
         </p:txBody>
       </p:sp>
@@ -1365,8 +1369,10 @@
           <a:lstStyle/>
           <a:p>
             <a:r>
-              <a:t>Trace one request end-to-end. The key engineering points: (1) validation happens before any business logic, (2) points are computed once and STORED, not recalculated on read, (3) the response drives cache invalidation so the UI updates without a reload. Registration follows the same shape with duplicate-name detection instead of scoring.</a:t>
-            </a:r>
+              <a:rPr lang="en-IN" dirty="0"/>
+              <a:t> </a:t>
+            </a:r>
+            <a:endParaRPr dirty="0"/>
           </a:p>
         </p:txBody>
       </p:sp>
@@ -1435,8 +1441,10 @@
           <a:lstStyle/>
           <a:p>
             <a:r>
-              <a:t>Two talking points: (1) The leaderboard is NOT a table — it's computed at query time, so it's always correct. (2) Duplicate detection is defence-in-depth: app check for a clean 409, plus a DB unique index that catches concurrent inserts the app check can miss. That two-layer answer directly addresses the 'concurrent requests' edge case in the spec.</a:t>
-            </a:r>
+              <a:rPr lang="en-IN" dirty="0"/>
+              <a:t> </a:t>
+            </a:r>
+            <a:endParaRPr dirty="0"/>
           </a:p>
         </p:txBody>
       </p:sp>
@@ -1505,8 +1513,10 @@
           <a:lstStyle/>
           <a:p>
             <a:r>
-              <a:t>Highlight consistency: one error shape across every endpoint means the frontend has exactly one error-handling path. Mention versioning (/v1/) as forward-thinking. If asked about the leaderboard Page envelope, mention @EnableSpringDataWebSupport(VIA_DTO) for a stable JSON structure.</a:t>
-            </a:r>
+              <a:rPr lang="en-IN" dirty="0"/>
+              <a:t> </a:t>
+            </a:r>
+            <a:endParaRPr dirty="0"/>
           </a:p>
         </p:txBody>
       </p:sp>
@@ -12169,7 +12179,7 @@
               </a:spcAft>
             </a:pPr>
             <a:r>
-              <a:rPr lang="en-IN" sz="1250">
+              <a:rPr lang="en-IN" sz="1250" dirty="0">
                 <a:solidFill>
                   <a:srgbClr val="475569"/>
                 </a:solidFill>
@@ -12178,22 +12188,13 @@
               <a:t>Check</a:t>
             </a:r>
             <a:r>
-              <a:rPr sz="1250">
+              <a:rPr sz="1250" dirty="0">
                 <a:solidFill>
                   <a:srgbClr val="475569"/>
                 </a:solidFill>
                 <a:latin typeface="Segoe UI"/>
               </a:rPr>
-              <a:t> </a:t>
-            </a:r>
-            <a:r>
-              <a:rPr sz="1250" dirty="0">
-                <a:solidFill>
-                  <a:srgbClr val="475569"/>
-                </a:solidFill>
-                <a:latin typeface="Segoe UI"/>
-              </a:rPr>
-              <a:t>response on duplicate key</a:t>
+              <a:t> response on duplicate key</a:t>
             </a:r>
           </a:p>
           <a:p>
